--- a/slide/themes/src/14_alphabet.pptx
+++ b/slide/themes/src/14_alphabet.pptx
@@ -19579,12 +19579,12 @@
     <a:fontScheme name="Office Theme">
       <a:majorFont>
         <a:latin typeface="Arial"/>
-        <a:ea typeface="SimSun"/>
+        <a:ea typeface="Microsoft YaHei"/>
         <a:cs typeface="Arial"/>
       </a:majorFont>
       <a:minorFont>
         <a:latin typeface="Arial"/>
-        <a:ea typeface="SimSun"/>
+        <a:ea typeface="Microsoft YaHei"/>
         <a:cs typeface="Arial"/>
       </a:minorFont>
     </a:fontScheme>
@@ -19816,12 +19816,12 @@
     <a:fontScheme name="Arial">
       <a:majorFont>
         <a:latin typeface="Arial"/>
-        <a:ea typeface="Arial"/>
+        <a:ea typeface="Microsoft YaHei"/>
         <a:cs typeface="Arial"/>
       </a:majorFont>
       <a:minorFont>
         <a:latin typeface="Arial"/>
-        <a:ea typeface="Arial"/>
+        <a:ea typeface="Microsoft YaHei"/>
         <a:cs typeface="Arial"/>
       </a:minorFont>
     </a:fontScheme>

--- a/slide/themes/src/14_alphabet.pptx
+++ b/slide/themes/src/14_alphabet.pptx
@@ -536,10 +536,7 @@
             <a:pPr>
               <a:defRPr/>
             </a:pPr>
-            <a:endParaRPr lang="en-US">
-              <a:latin typeface="Arial"/>
-              <a:cs typeface="Arial"/>
-            </a:endParaRPr>
+            <a:endParaRPr lang="en-US"/>
           </a:p>
         </p:txBody>
       </p:sp>
